--- a/презентация.pptx
+++ b/презентация.pptx
@@ -15885,8 +15885,13 @@
             </a:pPr>
             <a:r>
               <a:rPr lang="ru-RU" dirty="0"/>
-              <a:t>Цель и объект исследования</a:t>
+              <a:t>Цель </a:t>
             </a:r>
+            <a:r>
+              <a:rPr lang="ru-RU"/>
+              <a:t>и объект</a:t>
+            </a:r>
+            <a:endParaRPr lang="ru-RU" dirty="0"/>
           </a:p>
         </p:txBody>
       </p:sp>
